--- a/docs/quickguides/en/vans/pptx/23_Quick_Guide_oneSCM_FAQ_Troubleshooting_und_Support_EN.pptx
+++ b/docs/quickguides/en/vans/pptx/23_Quick_Guide_oneSCM_FAQ_Troubleshooting_und_Support_EN.pptx
@@ -1503,7 +1503,7 @@
                 <a:ea typeface="MB Corpo S Text Office" pitchFamily="34" charset="-122"/>
                 <a:cs typeface="MB Corpo S Text Office" pitchFamily="34" charset="-120"/>
               </a:rPr>
-              <a:t>This document is interactive – references to handbook chapters and systems are provided as links.</a:t>
+              <a:t>References to handbook chapters and systems are highlighted; e-mail addresses are provided as links.</a:t>
             </a:r>
             <a:endParaRPr lang="en-US" sz="900" dirty="0"/>
           </a:p>
@@ -3171,11 +3171,11 @@
         <p:spPr>
           <a:xfrm>
             <a:off x="201168" y="4242816"/>
-            <a:ext cx="4663440" cy="1170432"/>
+            <a:ext cx="4663440" cy="1316736"/>
           </a:xfrm>
           <a:prstGeom prst="roundRect">
             <a:avLst>
-              <a:gd name="adj" fmla="val 7813"/>
+              <a:gd name="adj" fmla="val 6944"/>
             </a:avLst>
           </a:prstGeom>
           <a:solidFill>
@@ -3239,7 +3239,7 @@
         <p:spPr>
           <a:xfrm>
             <a:off x="310896" y="4590288"/>
-            <a:ext cx="4480560" cy="768096"/>
+            <a:ext cx="4480560" cy="914400"/>
           </a:xfrm>
           <a:prstGeom prst="rect">
             <a:avLst/>
@@ -3288,7 +3288,7 @@
                 <a:ea typeface="MB Corpo S Text Office" pitchFamily="34" charset="-122"/>
                 <a:cs typeface="MB Corpo S Text Office" pitchFamily="34" charset="-120"/>
               </a:rPr>
-              <a:t>Ticket references help assign your issue to the right chapter (Appendix E).</a:t>
+              <a:t>During contract creation for MBIL, the product query can end with a server error; repeat the query and report the case (23.2).</a:t>
             </a:r>
             <a:endParaRPr lang="en-US" sz="900" dirty="0"/>
           </a:p>
@@ -3608,6 +3608,13 @@
                 <a:latin typeface="MB Corpo S Text Office" pitchFamily="34" charset="0"/>
                 <a:ea typeface="MB Corpo S Text Office" pitchFamily="34" charset="-122"/>
                 <a:cs typeface="MB Corpo S Text Office" pitchFamily="34" charset="-120"/>
+                <a:hlinkClick r:id="rId3" invalidUrl="" action="" tgtFrame="" tooltip="sc-van@mercedes-benz.com" history="1" highlightClick="0" endSnd="0">
+                  <a:extLst>
+                    <a:ext uri="{A12FA001-AC4F-418D-AE19-62706E023703}">
+                      <ahyp:hlinkClr xmlns:ahyp="http://schemas.microsoft.com/office/drawing/2018/hyperlinkcolor" val="tx"/>
+                    </a:ext>
+                  </a:extLst>
+                </a:hlinkClick>
               </a:rPr>
               <a:t>sc-van@mercedes-benz.com</a:t>
             </a:r>
